--- a/assets/MLOps_Accidents.pptx
+++ b/assets/MLOps_Accidents.pptx
@@ -5,68 +5,69 @@
     <p:sldMasterId id="2147483713" r:id="rId1"/>
   </p:sldMasterIdLst>
   <p:notesMasterIdLst>
-    <p:notesMasterId r:id="rId11"/>
+    <p:notesMasterId r:id="rId12"/>
   </p:notesMasterIdLst>
   <p:sldIdLst>
     <p:sldId id="256" r:id="rId2"/>
     <p:sldId id="258" r:id="rId3"/>
     <p:sldId id="311" r:id="rId4"/>
-    <p:sldId id="304" r:id="rId5"/>
-    <p:sldId id="312" r:id="rId6"/>
-    <p:sldId id="313" r:id="rId7"/>
-    <p:sldId id="310" r:id="rId8"/>
-    <p:sldId id="316" r:id="rId9"/>
-    <p:sldId id="301" r:id="rId10"/>
+    <p:sldId id="317" r:id="rId5"/>
+    <p:sldId id="304" r:id="rId6"/>
+    <p:sldId id="312" r:id="rId7"/>
+    <p:sldId id="313" r:id="rId8"/>
+    <p:sldId id="310" r:id="rId9"/>
+    <p:sldId id="316" r:id="rId10"/>
+    <p:sldId id="301" r:id="rId11"/>
   </p:sldIdLst>
   <p:sldSz cx="9144000" cy="5143500" type="screen16x9"/>
   <p:notesSz cx="6858000" cy="9144000"/>
   <p:embeddedFontLst>
     <p:embeddedFont>
       <p:font typeface="Inter" panose="020B0604020202020204" charset="0"/>
-      <p:regular r:id="rId12"/>
-      <p:bold r:id="rId13"/>
-      <p:italic r:id="rId14"/>
-      <p:boldItalic r:id="rId15"/>
+      <p:regular r:id="rId13"/>
+      <p:bold r:id="rId14"/>
+      <p:italic r:id="rId15"/>
+      <p:boldItalic r:id="rId16"/>
     </p:embeddedFont>
     <p:embeddedFont>
       <p:font typeface="Inter Medium" panose="020B0604020202020204" charset="0"/>
-      <p:regular r:id="rId16"/>
-      <p:bold r:id="rId17"/>
-      <p:italic r:id="rId18"/>
-      <p:boldItalic r:id="rId19"/>
+      <p:regular r:id="rId17"/>
+      <p:bold r:id="rId18"/>
+      <p:italic r:id="rId19"/>
+      <p:boldItalic r:id="rId20"/>
     </p:embeddedFont>
     <p:embeddedFont>
       <p:font typeface="Rubik" panose="020B0604020202020204" charset="-79"/>
-      <p:regular r:id="rId20"/>
-      <p:bold r:id="rId21"/>
-      <p:italic r:id="rId22"/>
-      <p:boldItalic r:id="rId23"/>
+      <p:regular r:id="rId21"/>
+      <p:bold r:id="rId22"/>
+      <p:italic r:id="rId23"/>
+      <p:boldItalic r:id="rId24"/>
     </p:embeddedFont>
     <p:embeddedFont>
       <p:font typeface="Urbanist Black" panose="020B0604020202020204" charset="0"/>
-      <p:bold r:id="rId24"/>
-      <p:boldItalic r:id="rId25"/>
+      <p:bold r:id="rId25"/>
+      <p:boldItalic r:id="rId26"/>
     </p:embeddedFont>
     <p:embeddedFont>
       <p:font typeface="Work Sans" pitchFamily="2" charset="0"/>
-      <p:regular r:id="rId26"/>
-      <p:bold r:id="rId27"/>
-      <p:italic r:id="rId28"/>
-      <p:boldItalic r:id="rId29"/>
+      <p:regular r:id="rId27"/>
+      <p:bold r:id="rId28"/>
+      <p:italic r:id="rId29"/>
+      <p:boldItalic r:id="rId30"/>
     </p:embeddedFont>
     <p:embeddedFont>
       <p:font typeface="Work Sans Light" pitchFamily="2" charset="0"/>
-      <p:regular r:id="rId30"/>
-      <p:bold r:id="rId31"/>
-      <p:italic r:id="rId32"/>
-      <p:boldItalic r:id="rId33"/>
+      <p:regular r:id="rId31"/>
+      <p:bold r:id="rId32"/>
+      <p:italic r:id="rId33"/>
+      <p:boldItalic r:id="rId34"/>
     </p:embeddedFont>
     <p:embeddedFont>
       <p:font typeface="Work Sans Medium" pitchFamily="2" charset="0"/>
-      <p:regular r:id="rId34"/>
-      <p:bold r:id="rId35"/>
-      <p:italic r:id="rId36"/>
-      <p:boldItalic r:id="rId37"/>
+      <p:regular r:id="rId35"/>
+      <p:bold r:id="rId36"/>
+      <p:italic r:id="rId37"/>
+      <p:boldItalic r:id="rId38"/>
     </p:embeddedFont>
   </p:embeddedFontLst>
   <p:defaultTextStyle>
@@ -55378,6 +55379,174 @@
 </p:sld>
 </file>
 
+<file path=ppt/slides/slide10.xml><?xml version="1.0" encoding="utf-8"?>
+<p:sld xmlns:a="http://schemas.openxmlformats.org/drawingml/2006/main" xmlns:r="http://schemas.openxmlformats.org/officeDocument/2006/relationships" xmlns:p="http://schemas.openxmlformats.org/presentationml/2006/main">
+  <p:cSld>
+    <p:bg>
+      <p:bgPr>
+        <a:solidFill>
+          <a:srgbClr val="E8E7E1"/>
+        </a:solidFill>
+        <a:effectLst/>
+      </p:bgPr>
+    </p:bg>
+    <p:spTree>
+      <p:nvGrpSpPr>
+        <p:cNvPr id="1" name="Shape 935"/>
+        <p:cNvGrpSpPr/>
+        <p:nvPr/>
+      </p:nvGrpSpPr>
+      <p:grpSpPr>
+        <a:xfrm>
+          <a:off x="0" y="0"/>
+          <a:ext cx="0" cy="0"/>
+          <a:chOff x="0" y="0"/>
+          <a:chExt cx="0" cy="0"/>
+        </a:xfrm>
+      </p:grpSpPr>
+      <p:pic>
+        <p:nvPicPr>
+          <p:cNvPr id="936" name="Google Shape;936;p112"/>
+          <p:cNvPicPr preferRelativeResize="0"/>
+          <p:nvPr/>
+        </p:nvPicPr>
+        <p:blipFill rotWithShape="1">
+          <a:blip r:embed="rId3">
+            <a:alphaModFix/>
+          </a:blip>
+          <a:srcRect t="209" b="209"/>
+          <a:stretch/>
+        </p:blipFill>
+        <p:spPr>
+          <a:xfrm>
+            <a:off x="198000" y="4747499"/>
+            <a:ext cx="547501" cy="172176"/>
+          </a:xfrm>
+          <a:prstGeom prst="rect">
+            <a:avLst/>
+          </a:prstGeom>
+          <a:noFill/>
+          <a:ln>
+            <a:noFill/>
+          </a:ln>
+        </p:spPr>
+      </p:pic>
+      <p:pic>
+        <p:nvPicPr>
+          <p:cNvPr id="937" name="Google Shape;937;p112"/>
+          <p:cNvPicPr preferRelativeResize="0"/>
+          <p:nvPr/>
+        </p:nvPicPr>
+        <p:blipFill rotWithShape="1">
+          <a:blip r:embed="rId4">
+            <a:alphaModFix/>
+          </a:blip>
+          <a:srcRect t="18838" r="42337"/>
+          <a:stretch/>
+        </p:blipFill>
+        <p:spPr>
+          <a:xfrm rot="5400000" flipH="1">
+            <a:off x="5031851" y="670425"/>
+            <a:ext cx="4943124" cy="3425224"/>
+          </a:xfrm>
+          <a:prstGeom prst="rect">
+            <a:avLst/>
+          </a:prstGeom>
+          <a:noFill/>
+          <a:ln>
+            <a:noFill/>
+          </a:ln>
+        </p:spPr>
+      </p:pic>
+      <p:pic>
+        <p:nvPicPr>
+          <p:cNvPr id="938" name="Google Shape;938;p112" title="undraw_faq_h01d.gif"/>
+          <p:cNvPicPr preferRelativeResize="0"/>
+          <p:nvPr/>
+        </p:nvPicPr>
+        <p:blipFill>
+          <a:blip r:embed="rId5">
+            <a:alphaModFix/>
+          </a:blip>
+          <a:stretch>
+            <a:fillRect/>
+          </a:stretch>
+        </p:blipFill>
+        <p:spPr>
+          <a:xfrm>
+            <a:off x="2859744" y="755832"/>
+            <a:ext cx="3256831" cy="2092348"/>
+          </a:xfrm>
+          <a:prstGeom prst="rect">
+            <a:avLst/>
+          </a:prstGeom>
+          <a:noFill/>
+          <a:ln>
+            <a:noFill/>
+          </a:ln>
+        </p:spPr>
+      </p:pic>
+      <p:sp>
+        <p:nvSpPr>
+          <p:cNvPr id="939" name="Google Shape;939;p112"/>
+          <p:cNvSpPr/>
+          <p:nvPr/>
+        </p:nvSpPr>
+        <p:spPr>
+          <a:xfrm>
+            <a:off x="2140299" y="2883396"/>
+            <a:ext cx="5481375" cy="1080679"/>
+          </a:xfrm>
+          <a:prstGeom prst="roundRect">
+            <a:avLst>
+              <a:gd name="adj" fmla="val 5390"/>
+            </a:avLst>
+          </a:prstGeom>
+          <a:solidFill>
+            <a:srgbClr val="1A1A33"/>
+          </a:solidFill>
+          <a:ln>
+            <a:noFill/>
+          </a:ln>
+        </p:spPr>
+        <p:txBody>
+          <a:bodyPr spcFirstLastPara="1" wrap="square" lIns="142950" tIns="142950" rIns="142950" bIns="142950" anchor="ctr" anchorCtr="0">
+            <a:noAutofit/>
+          </a:bodyPr>
+          <a:lstStyle/>
+          <a:p>
+            <a:pPr marL="0" lvl="0" indent="0" algn="ctr" rtl="0">
+              <a:spcBef>
+                <a:spcPts val="0"/>
+              </a:spcBef>
+              <a:spcAft>
+                <a:spcPts val="0"/>
+              </a:spcAft>
+              <a:buNone/>
+            </a:pPr>
+            <a:r>
+              <a:rPr lang="fr" sz="2814" b="1" dirty="0">
+                <a:solidFill>
+                  <a:srgbClr val="F5FAFF"/>
+                </a:solidFill>
+                <a:latin typeface="Inter"/>
+                <a:ea typeface="Inter"/>
+                <a:cs typeface="Inter"/>
+                <a:sym typeface="Inter"/>
+              </a:rPr>
+              <a:t>Merci de votre attention</a:t>
+            </a:r>
+          </a:p>
+        </p:txBody>
+      </p:sp>
+    </p:spTree>
+  </p:cSld>
+  <p:clrMapOvr>
+    <a:masterClrMapping/>
+  </p:clrMapOvr>
+</p:sld>
+</file>
+
 <file path=ppt/slides/slide2.xml><?xml version="1.0" encoding="utf-8"?>
 <p:sld xmlns:a="http://schemas.openxmlformats.org/drawingml/2006/main" xmlns:r="http://schemas.openxmlformats.org/officeDocument/2006/relationships" xmlns:p="http://schemas.openxmlformats.org/presentationml/2006/main">
   <p:cSld>
@@ -55569,21 +55738,36 @@
             <a:r>
               <a:rPr lang="fr-FR" dirty="0">
                 <a:solidFill>
-                  <a:schemeClr val="dk2"/>
+                  <a:schemeClr val="tx1"/>
                 </a:solidFill>
               </a:rPr>
-              <a:t>Architecture de la solution </a:t>
+              <a:t>Feuille de route</a:t>
+            </a:r>
+            <a:br>
+              <a:rPr lang="fr-FR" dirty="0">
+                <a:solidFill>
+                  <a:schemeClr val="tx1"/>
+                </a:solidFill>
+              </a:rPr>
+            </a:br>
+            <a:r>
+              <a:rPr lang="fr-FR">
+                <a:solidFill>
+                  <a:srgbClr val="FF6745"/>
+                </a:solidFill>
+              </a:rPr>
+              <a:t>4- </a:t>
             </a:r>
             <a:r>
-              <a:rPr lang="fr-FR" dirty="0" err="1">
+              <a:rPr lang="fr-FR">
                 <a:solidFill>
                   <a:schemeClr val="dk2"/>
                 </a:solidFill>
               </a:rPr>
-              <a:t>MLOPs</a:t>
+              <a:t>Architecture</a:t>
             </a:r>
             <a:br>
-              <a:rPr lang="fr-FR" dirty="0">
+              <a:rPr lang="fr-FR">
                 <a:solidFill>
                   <a:schemeClr val="dk2"/>
                 </a:solidFill>
@@ -55595,7 +55779,15 @@
                   <a:srgbClr val="FF6745"/>
                 </a:solidFill>
               </a:rPr>
-              <a:t>4- </a:t>
+              <a:t>5</a:t>
+            </a:r>
+            <a:r>
+              <a:rPr lang="fr-FR">
+                <a:solidFill>
+                  <a:srgbClr val="FF6745"/>
+                </a:solidFill>
+              </a:rPr>
+              <a:t>- </a:t>
             </a:r>
             <a:r>
               <a:rPr lang="fr-FR" dirty="0">
@@ -55603,10 +55795,10 @@
                   <a:schemeClr val="dk2"/>
                 </a:solidFill>
               </a:rPr>
-              <a:t>Informations générales</a:t>
+              <a:t>Principales difficultés rencontrées</a:t>
             </a:r>
             <a:br>
-              <a:rPr lang="fr-FR" dirty="0">
+              <a:rPr lang="fr-FR">
                 <a:solidFill>
                   <a:schemeClr val="dk2"/>
                 </a:solidFill>
@@ -55618,7 +55810,23 @@
                   <a:srgbClr val="FF6745"/>
                 </a:solidFill>
               </a:rPr>
-              <a:t>5-</a:t>
+              <a:t>6</a:t>
+            </a:r>
+            <a:r>
+              <a:rPr lang="fr-FR">
+                <a:solidFill>
+                  <a:srgbClr val="FF6745"/>
+                </a:solidFill>
+              </a:rPr>
+              <a:t>-</a:t>
+            </a:r>
+            <a:r>
+              <a:rPr lang="fr-FR">
+                <a:solidFill>
+                  <a:schemeClr val="dk2"/>
+                </a:solidFill>
+              </a:rPr>
+              <a:t> </a:t>
             </a:r>
             <a:r>
               <a:rPr lang="fr-FR" dirty="0">
@@ -55626,53 +55834,7 @@
                   <a:schemeClr val="dk2"/>
                 </a:solidFill>
               </a:rPr>
-              <a:t> Architecture</a:t>
-            </a:r>
-            <a:br>
-              <a:rPr lang="fr-FR" dirty="0">
-                <a:solidFill>
-                  <a:schemeClr val="dk2"/>
-                </a:solidFill>
-              </a:rPr>
-            </a:br>
-            <a:r>
-              <a:rPr lang="fr-FR" dirty="0">
-                <a:solidFill>
-                  <a:srgbClr val="FF6745"/>
-                </a:solidFill>
-              </a:rPr>
-              <a:t>6- </a:t>
-            </a:r>
-            <a:r>
-              <a:rPr lang="fr-FR" dirty="0">
-                <a:solidFill>
-                  <a:schemeClr val="dk2"/>
-                </a:solidFill>
-              </a:rPr>
-              <a:t>Principales difficultés rencontrées</a:t>
-            </a:r>
-            <a:br>
-              <a:rPr lang="fr-FR" dirty="0">
-                <a:solidFill>
-                  <a:schemeClr val="dk2"/>
-                </a:solidFill>
-              </a:rPr>
-            </a:br>
-            <a:r>
-              <a:rPr lang="fr-FR" dirty="0">
-                <a:solidFill>
-                  <a:srgbClr val="FF6745"/>
-                </a:solidFill>
-              </a:rPr>
-              <a:t>7-</a:t>
-            </a:r>
-            <a:r>
-              <a:rPr lang="fr-FR" dirty="0">
-                <a:solidFill>
-                  <a:schemeClr val="dk2"/>
-                </a:solidFill>
-              </a:rPr>
-              <a:t> Résultats &amp; Perspectives</a:t>
+              <a:t>Résultats &amp; Perspectives</a:t>
             </a:r>
           </a:p>
         </p:txBody>
@@ -56739,6 +56901,757 @@
   <p:cSld>
     <p:spTree>
       <p:nvGrpSpPr>
+        <p:cNvPr id="1" name="">
+          <a:extLst>
+            <a:ext uri="{FF2B5EF4-FFF2-40B4-BE49-F238E27FC236}">
+              <a16:creationId xmlns:a16="http://schemas.microsoft.com/office/drawing/2014/main" id="{F2C55500-0293-0D2E-6DF3-16A11D49C29D}"/>
+            </a:ext>
+          </a:extLst>
+        </p:cNvPr>
+        <p:cNvGrpSpPr/>
+        <p:nvPr/>
+      </p:nvGrpSpPr>
+      <p:grpSpPr>
+        <a:xfrm>
+          <a:off x="0" y="0"/>
+          <a:ext cx="0" cy="0"/>
+          <a:chOff x="0" y="0"/>
+          <a:chExt cx="0" cy="0"/>
+        </a:xfrm>
+      </p:grpSpPr>
+      <p:sp>
+        <p:nvSpPr>
+          <p:cNvPr id="5" name="Sous-titre 4">
+            <a:extLst>
+              <a:ext uri="{FF2B5EF4-FFF2-40B4-BE49-F238E27FC236}">
+                <a16:creationId xmlns:a16="http://schemas.microsoft.com/office/drawing/2014/main" id="{09681DAB-A5C0-5B7D-05BE-CD86E5DB66F9}"/>
+              </a:ext>
+            </a:extLst>
+          </p:cNvPr>
+          <p:cNvSpPr>
+            <a:spLocks noGrp="1"/>
+          </p:cNvSpPr>
+          <p:nvPr>
+            <p:ph type="subTitle" idx="1"/>
+          </p:nvPr>
+        </p:nvSpPr>
+        <p:spPr/>
+        <p:txBody>
+          <a:bodyPr/>
+          <a:lstStyle/>
+          <a:p>
+            <a:r>
+              <a:rPr lang="en-US" b="1" dirty="0"/>
+              <a:t>Choix des KPIs et tri des variables</a:t>
+            </a:r>
+            <a:endParaRPr lang="fr-FR" dirty="0"/>
+          </a:p>
+        </p:txBody>
+      </p:sp>
+      <p:sp>
+        <p:nvSpPr>
+          <p:cNvPr id="8" name="Objectives Box">
+            <a:extLst>
+              <a:ext uri="{FF2B5EF4-FFF2-40B4-BE49-F238E27FC236}">
+                <a16:creationId xmlns:a16="http://schemas.microsoft.com/office/drawing/2014/main" id="{43B9FC3A-A391-F4EB-4782-F3A737A16EC7}"/>
+              </a:ext>
+            </a:extLst>
+          </p:cNvPr>
+          <p:cNvSpPr txBox="1">
+            <a:spLocks noGrp="1"/>
+          </p:cNvSpPr>
+          <p:nvPr>
+            <p:ph type="body" idx="2"/>
+          </p:nvPr>
+        </p:nvSpPr>
+        <p:spPr>
+          <a:xfrm>
+            <a:off x="198438" y="730250"/>
+            <a:ext cx="4275137" cy="3034395"/>
+          </a:xfrm>
+          <a:prstGeom prst="roundRect">
+            <a:avLst>
+              <a:gd name="adj" fmla="val 5000"/>
+            </a:avLst>
+          </a:prstGeom>
+          <a:solidFill>
+            <a:srgbClr val="2A2A4A"/>
+          </a:solidFill>
+          <a:ln>
+            <a:noFill/>
+          </a:ln>
+        </p:spPr>
+        <p:txBody>
+          <a:bodyPr wrap="square" lIns="180000" tIns="180000" rIns="180000" bIns="180000" anchor="t">
+            <a:spAutoFit/>
+          </a:bodyPr>
+          <a:lstStyle/>
+          <a:p>
+            <a:pPr marL="182880" lvl="0" indent="-182880">
+              <a:lnSpc>
+                <a:spcPct val="100000"/>
+              </a:lnSpc>
+              <a:buSzPts val="1800"/>
+              <a:buFont typeface="Arial"/>
+              <a:buChar char="❖"/>
+            </a:pPr>
+            <a:r>
+              <a:rPr lang="fr-FR" sz="1800" b="1" dirty="0">
+                <a:solidFill>
+                  <a:schemeClr val="bg1"/>
+                </a:solidFill>
+                <a:latin typeface="Arial"/>
+                <a:ea typeface="Arial"/>
+                <a:cs typeface="Arial"/>
+                <a:sym typeface="Arial"/>
+              </a:rPr>
+              <a:t>KPI décisionnaire</a:t>
+            </a:r>
+            <a:endParaRPr lang="fr-FR" sz="1400" dirty="0">
+              <a:solidFill>
+                <a:schemeClr val="bg1"/>
+              </a:solidFill>
+              <a:latin typeface="Arial"/>
+              <a:ea typeface="Arial"/>
+              <a:cs typeface="Arial"/>
+              <a:sym typeface="Arial"/>
+            </a:endParaRPr>
+          </a:p>
+          <a:p>
+            <a:pPr marL="365760" lvl="1" indent="-180340">
+              <a:lnSpc>
+                <a:spcPct val="100000"/>
+              </a:lnSpc>
+              <a:buSzPts val="1400"/>
+              <a:buFont typeface="Arial"/>
+              <a:buChar char="➢"/>
+            </a:pPr>
+            <a:r>
+              <a:rPr lang="fr-FR" sz="1400" dirty="0">
+                <a:solidFill>
+                  <a:schemeClr val="bg1"/>
+                </a:solidFill>
+                <a:latin typeface="Arial"/>
+                <a:ea typeface="Arial"/>
+                <a:cs typeface="Arial"/>
+                <a:sym typeface="Arial"/>
+              </a:rPr>
+              <a:t>Principe: mieux vaut trop de secours pour un accident léger que trop peu pour un accidente grave</a:t>
+            </a:r>
+          </a:p>
+          <a:p>
+            <a:pPr marL="365760" lvl="1" indent="-180340">
+              <a:lnSpc>
+                <a:spcPct val="100000"/>
+              </a:lnSpc>
+              <a:buSzPts val="1400"/>
+              <a:buFont typeface="Arial"/>
+              <a:buChar char="➢"/>
+            </a:pPr>
+            <a:r>
+              <a:rPr lang="fr-FR" sz="1400" dirty="0">
+                <a:solidFill>
+                  <a:schemeClr val="bg1"/>
+                </a:solidFill>
+                <a:latin typeface="Arial"/>
+                <a:ea typeface="Arial"/>
+                <a:cs typeface="Arial"/>
+                <a:sym typeface="Arial"/>
+              </a:rPr>
+              <a:t>Variable “</a:t>
+            </a:r>
+            <a:r>
+              <a:rPr lang="fr-FR" sz="1400" dirty="0" err="1">
+                <a:solidFill>
+                  <a:schemeClr val="bg1"/>
+                </a:solidFill>
+                <a:latin typeface="Arial"/>
+                <a:ea typeface="Arial"/>
+                <a:cs typeface="Arial"/>
+                <a:sym typeface="Arial"/>
+              </a:rPr>
+              <a:t>grav</a:t>
+            </a:r>
+            <a:r>
+              <a:rPr lang="fr-FR" sz="1400" dirty="0">
+                <a:solidFill>
+                  <a:schemeClr val="bg1"/>
+                </a:solidFill>
+                <a:latin typeface="Arial"/>
+                <a:ea typeface="Arial"/>
+                <a:cs typeface="Arial"/>
+                <a:sym typeface="Arial"/>
+              </a:rPr>
+              <a:t>” (</a:t>
+            </a:r>
+            <a:r>
+              <a:rPr lang="fr-FR" sz="1400" dirty="0" err="1">
+                <a:solidFill>
+                  <a:schemeClr val="bg1"/>
+                </a:solidFill>
+                <a:latin typeface="Arial"/>
+                <a:ea typeface="Arial"/>
+                <a:cs typeface="Arial"/>
+                <a:sym typeface="Arial"/>
+              </a:rPr>
+              <a:t>target</a:t>
+            </a:r>
+            <a:r>
+              <a:rPr lang="fr-FR" sz="1400" dirty="0">
+                <a:solidFill>
+                  <a:schemeClr val="bg1"/>
+                </a:solidFill>
+                <a:latin typeface="Arial"/>
+                <a:ea typeface="Arial"/>
+                <a:cs typeface="Arial"/>
+                <a:sym typeface="Arial"/>
+              </a:rPr>
+              <a:t>) à pour valeurs: 1 (Indemne);  2 (Tué);  3 (Blessé hospitalisé); 4 (Blessé léger)</a:t>
+            </a:r>
+          </a:p>
+          <a:p>
+            <a:pPr marL="548640" lvl="2" indent="-167640">
+              <a:lnSpc>
+                <a:spcPct val="100000"/>
+              </a:lnSpc>
+              <a:buFont typeface="Arial"/>
+              <a:buChar char="■"/>
+            </a:pPr>
+            <a:r>
+              <a:rPr lang="fr-FR" dirty="0">
+                <a:solidFill>
+                  <a:schemeClr val="bg1"/>
+                </a:solidFill>
+                <a:latin typeface="Arial"/>
+                <a:ea typeface="Arial"/>
+                <a:cs typeface="Arial"/>
+                <a:sym typeface="Arial"/>
+              </a:rPr>
+              <a:t>2 classes distinctes sont définies:</a:t>
+            </a:r>
+          </a:p>
+          <a:p>
+            <a:pPr marL="731520" lvl="3" indent="-154940">
+              <a:lnSpc>
+                <a:spcPct val="100000"/>
+              </a:lnSpc>
+              <a:buSzPts val="1000"/>
+              <a:buFont typeface="Arial"/>
+              <a:buChar char="●"/>
+            </a:pPr>
+            <a:r>
+              <a:rPr lang="fr-FR" sz="1000" dirty="0">
+                <a:solidFill>
+                  <a:schemeClr val="bg1"/>
+                </a:solidFill>
+                <a:latin typeface="Arial"/>
+                <a:ea typeface="Arial"/>
+                <a:cs typeface="Arial"/>
+                <a:sym typeface="Arial"/>
+              </a:rPr>
+              <a:t>Classe Positive: Événement à détecter = </a:t>
+            </a:r>
+            <a:r>
+              <a:rPr lang="fr-FR" sz="1000" b="1" dirty="0">
+                <a:solidFill>
+                  <a:schemeClr val="bg1"/>
+                </a:solidFill>
+                <a:latin typeface="Arial"/>
+                <a:ea typeface="Arial"/>
+                <a:cs typeface="Arial"/>
+                <a:sym typeface="Arial"/>
+              </a:rPr>
+              <a:t>Accident </a:t>
+            </a:r>
+            <a:r>
+              <a:rPr lang="fr-FR" sz="1000" dirty="0">
+                <a:solidFill>
+                  <a:schemeClr val="bg1"/>
+                </a:solidFill>
+                <a:latin typeface="Arial"/>
+                <a:ea typeface="Arial"/>
+                <a:cs typeface="Arial"/>
+                <a:sym typeface="Arial"/>
+              </a:rPr>
+              <a:t>(</a:t>
+            </a:r>
+            <a:r>
+              <a:rPr lang="fr-FR" sz="1000" dirty="0" err="1">
+                <a:solidFill>
+                  <a:schemeClr val="bg1"/>
+                </a:solidFill>
+                <a:latin typeface="Arial"/>
+                <a:ea typeface="Arial"/>
+                <a:cs typeface="Arial"/>
+                <a:sym typeface="Arial"/>
+              </a:rPr>
+              <a:t>grav</a:t>
+            </a:r>
+            <a:r>
+              <a:rPr lang="fr-FR" sz="1000" dirty="0">
+                <a:solidFill>
+                  <a:schemeClr val="bg1"/>
+                </a:solidFill>
+                <a:latin typeface="Arial"/>
+                <a:ea typeface="Arial"/>
+                <a:cs typeface="Arial"/>
+                <a:sym typeface="Arial"/>
+              </a:rPr>
+              <a:t> = 2 ou 3)</a:t>
+            </a:r>
+          </a:p>
+          <a:p>
+            <a:pPr marL="731520" lvl="3" indent="-154940">
+              <a:lnSpc>
+                <a:spcPct val="100000"/>
+              </a:lnSpc>
+              <a:buSzPts val="1000"/>
+              <a:buFont typeface="Arial"/>
+              <a:buChar char="●"/>
+            </a:pPr>
+            <a:r>
+              <a:rPr lang="fr-FR" sz="1000" dirty="0">
+                <a:solidFill>
+                  <a:schemeClr val="bg1"/>
+                </a:solidFill>
+                <a:latin typeface="Arial"/>
+                <a:ea typeface="Arial"/>
+                <a:cs typeface="Arial"/>
+                <a:sym typeface="Arial"/>
+              </a:rPr>
+              <a:t>Classe Négative: Événement à détecter = </a:t>
+            </a:r>
+            <a:r>
+              <a:rPr lang="fr-FR" sz="1000" b="1" dirty="0">
+                <a:solidFill>
+                  <a:schemeClr val="bg1"/>
+                </a:solidFill>
+                <a:latin typeface="Arial"/>
+                <a:ea typeface="Arial"/>
+                <a:cs typeface="Arial"/>
+                <a:sym typeface="Arial"/>
+              </a:rPr>
+              <a:t>Absence d’Accident </a:t>
+            </a:r>
+            <a:r>
+              <a:rPr lang="fr-FR" sz="1000" dirty="0">
+                <a:solidFill>
+                  <a:schemeClr val="bg1"/>
+                </a:solidFill>
+                <a:latin typeface="Arial"/>
+                <a:ea typeface="Arial"/>
+                <a:cs typeface="Arial"/>
+                <a:sym typeface="Arial"/>
+              </a:rPr>
+              <a:t>(</a:t>
+            </a:r>
+            <a:r>
+              <a:rPr lang="fr-FR" sz="1000" dirty="0" err="1">
+                <a:solidFill>
+                  <a:schemeClr val="bg1"/>
+                </a:solidFill>
+                <a:latin typeface="Arial"/>
+                <a:ea typeface="Arial"/>
+                <a:cs typeface="Arial"/>
+                <a:sym typeface="Arial"/>
+              </a:rPr>
+              <a:t>grav</a:t>
+            </a:r>
+            <a:r>
+              <a:rPr lang="fr-FR" sz="1000" dirty="0">
+                <a:solidFill>
+                  <a:schemeClr val="bg1"/>
+                </a:solidFill>
+                <a:latin typeface="Arial"/>
+                <a:ea typeface="Arial"/>
+                <a:cs typeface="Arial"/>
+                <a:sym typeface="Arial"/>
+              </a:rPr>
+              <a:t> = 1 ou 4)</a:t>
+            </a:r>
+          </a:p>
+          <a:p>
+            <a:pPr marL="365760" lvl="1" indent="-180340">
+              <a:lnSpc>
+                <a:spcPct val="100000"/>
+              </a:lnSpc>
+              <a:buClr>
+                <a:srgbClr val="FF0000"/>
+              </a:buClr>
+              <a:buSzPts val="1400"/>
+              <a:buFont typeface="Arial"/>
+              <a:buChar char="➢"/>
+            </a:pPr>
+            <a:r>
+              <a:rPr lang="fr-FR" sz="1400" b="1" dirty="0">
+                <a:solidFill>
+                  <a:srgbClr val="FF0000"/>
+                </a:solidFill>
+                <a:latin typeface="Arial"/>
+                <a:ea typeface="Arial"/>
+                <a:cs typeface="Arial"/>
+                <a:sym typeface="Arial"/>
+              </a:rPr>
+              <a:t>KPI principal: </a:t>
+            </a:r>
+            <a:r>
+              <a:rPr lang="fr-FR" sz="1400" b="1" dirty="0" err="1">
+                <a:solidFill>
+                  <a:srgbClr val="FF0000"/>
+                </a:solidFill>
+                <a:latin typeface="Arial"/>
+                <a:ea typeface="Arial"/>
+                <a:cs typeface="Arial"/>
+                <a:sym typeface="Arial"/>
+              </a:rPr>
+              <a:t>Recall</a:t>
+            </a:r>
+            <a:r>
+              <a:rPr lang="fr-FR" sz="1400" b="1" dirty="0">
+                <a:solidFill>
+                  <a:srgbClr val="FF0000"/>
+                </a:solidFill>
+                <a:latin typeface="Arial"/>
+                <a:ea typeface="Arial"/>
+                <a:cs typeface="Arial"/>
+                <a:sym typeface="Arial"/>
+              </a:rPr>
+              <a:t> </a:t>
+            </a:r>
+            <a:r>
+              <a:rPr lang="fr-FR" sz="1400" b="1" dirty="0" err="1">
+                <a:solidFill>
+                  <a:srgbClr val="FF0000"/>
+                </a:solidFill>
+                <a:latin typeface="Arial"/>
+                <a:ea typeface="Arial"/>
+                <a:cs typeface="Arial"/>
+                <a:sym typeface="Arial"/>
+              </a:rPr>
+              <a:t>gravity</a:t>
+            </a:r>
+            <a:r>
+              <a:rPr lang="fr-FR" sz="1400" b="1" dirty="0">
+                <a:solidFill>
+                  <a:srgbClr val="FF0000"/>
+                </a:solidFill>
+                <a:latin typeface="Arial"/>
+                <a:ea typeface="Arial"/>
+                <a:cs typeface="Arial"/>
+                <a:sym typeface="Arial"/>
+              </a:rPr>
+              <a:t> (VP/(VP+FN)</a:t>
+            </a:r>
+          </a:p>
+        </p:txBody>
+      </p:sp>
+      <p:sp>
+        <p:nvSpPr>
+          <p:cNvPr id="10" name="Team Box">
+            <a:extLst>
+              <a:ext uri="{FF2B5EF4-FFF2-40B4-BE49-F238E27FC236}">
+                <a16:creationId xmlns:a16="http://schemas.microsoft.com/office/drawing/2014/main" id="{01DE51CD-5DE6-D713-7F5B-BD911CDF00BE}"/>
+              </a:ext>
+            </a:extLst>
+          </p:cNvPr>
+          <p:cNvSpPr txBox="1"/>
+          <p:nvPr/>
+        </p:nvSpPr>
+        <p:spPr>
+          <a:xfrm>
+            <a:off x="4670426" y="730250"/>
+            <a:ext cx="4328793" cy="4350969"/>
+          </a:xfrm>
+          <a:prstGeom prst="roundRect">
+            <a:avLst>
+              <a:gd name="adj" fmla="val 5000"/>
+            </a:avLst>
+          </a:prstGeom>
+          <a:solidFill>
+            <a:srgbClr val="FF6745"/>
+          </a:solidFill>
+          <a:ln>
+            <a:noFill/>
+          </a:ln>
+        </p:spPr>
+        <p:txBody>
+          <a:bodyPr wrap="square" lIns="180000" tIns="180000" rIns="180000" bIns="180000" anchor="t">
+            <a:spAutoFit/>
+          </a:bodyPr>
+          <a:lstStyle/>
+          <a:p>
+            <a:pPr marL="182880" lvl="0" indent="-182880">
+              <a:spcBef>
+                <a:spcPts val="600"/>
+              </a:spcBef>
+              <a:buSzPts val="1800"/>
+              <a:buFont typeface="Arial"/>
+              <a:buChar char="❖"/>
+            </a:pPr>
+            <a:r>
+              <a:rPr lang="fr-FR" sz="1800" b="1" dirty="0">
+                <a:solidFill>
+                  <a:schemeClr val="bg1"/>
+                </a:solidFill>
+              </a:rPr>
+              <a:t>KPIs de suivis</a:t>
+            </a:r>
+            <a:r>
+              <a:rPr lang="fr-FR" sz="1800" dirty="0">
+                <a:solidFill>
+                  <a:schemeClr val="bg1"/>
+                </a:solidFill>
+              </a:rPr>
+              <a:t>: </a:t>
+            </a:r>
+            <a:endParaRPr lang="fr-FR" sz="1100" dirty="0">
+              <a:solidFill>
+                <a:schemeClr val="bg1"/>
+              </a:solidFill>
+            </a:endParaRPr>
+          </a:p>
+          <a:p>
+            <a:pPr marL="365760" lvl="1" indent="-180340">
+              <a:buClr>
+                <a:srgbClr val="0000FF"/>
+              </a:buClr>
+              <a:buSzPts val="1400"/>
+              <a:buFont typeface="Arial"/>
+              <a:buChar char="➢"/>
+            </a:pPr>
+            <a:r>
+              <a:rPr lang="fr-FR" b="1" dirty="0">
+                <a:solidFill>
+                  <a:schemeClr val="bg1"/>
+                </a:solidFill>
+              </a:rPr>
+              <a:t>F1-Score Macro : moyenne algébrique des 2 classes</a:t>
+            </a:r>
+            <a:endParaRPr lang="fr-FR" dirty="0">
+              <a:solidFill>
+                <a:schemeClr val="bg1"/>
+              </a:solidFill>
+            </a:endParaRPr>
+          </a:p>
+          <a:p>
+            <a:pPr marL="548640" lvl="2" indent="-167640">
+              <a:buClr>
+                <a:srgbClr val="0F2645"/>
+              </a:buClr>
+              <a:buFont typeface="Arial"/>
+              <a:buChar char="■"/>
+            </a:pPr>
+            <a:r>
+              <a:rPr lang="fr-FR" dirty="0">
+                <a:solidFill>
+                  <a:schemeClr val="bg1"/>
+                </a:solidFill>
+              </a:rPr>
+              <a:t>S'assurer que le modèle est performant même sur la classe "</a:t>
+            </a:r>
+            <a:r>
+              <a:rPr lang="fr-FR" b="1" dirty="0">
+                <a:solidFill>
+                  <a:schemeClr val="bg1"/>
+                </a:solidFill>
+              </a:rPr>
+              <a:t>prioritaire </a:t>
+            </a:r>
+            <a:r>
+              <a:rPr lang="fr-FR" dirty="0">
+                <a:solidFill>
+                  <a:schemeClr val="bg1"/>
+                </a:solidFill>
+              </a:rPr>
+              <a:t>", statistiquement la plus rare</a:t>
+            </a:r>
+          </a:p>
+          <a:p>
+            <a:pPr marL="548640" lvl="2" indent="-167640">
+              <a:buClr>
+                <a:srgbClr val="0F2645"/>
+              </a:buClr>
+              <a:buFont typeface="Arial"/>
+              <a:buChar char="■"/>
+            </a:pPr>
+            <a:r>
+              <a:rPr lang="fr-FR" dirty="0">
+                <a:solidFill>
+                  <a:schemeClr val="bg1"/>
+                </a:solidFill>
+              </a:rPr>
+              <a:t>Moyenne algébrique pour compenser le déséquilibre des classes</a:t>
+            </a:r>
+          </a:p>
+          <a:p>
+            <a:pPr marL="365760" lvl="1" indent="-180340">
+              <a:buClr>
+                <a:srgbClr val="0000FF"/>
+              </a:buClr>
+              <a:buSzPts val="1400"/>
+              <a:buFont typeface="Arial"/>
+              <a:buChar char="➢"/>
+            </a:pPr>
+            <a:r>
+              <a:rPr lang="fr-FR" b="1" dirty="0" err="1">
+                <a:solidFill>
+                  <a:schemeClr val="bg1"/>
+                </a:solidFill>
+              </a:rPr>
+              <a:t>Accuracy</a:t>
+            </a:r>
+            <a:endParaRPr lang="fr-FR" dirty="0">
+              <a:solidFill>
+                <a:schemeClr val="bg1"/>
+              </a:solidFill>
+            </a:endParaRPr>
+          </a:p>
+          <a:p>
+            <a:pPr marL="548640" lvl="2" indent="-167640">
+              <a:buFont typeface="Arial"/>
+              <a:buChar char="■"/>
+            </a:pPr>
+            <a:r>
+              <a:rPr lang="fr-FR" dirty="0">
+                <a:solidFill>
+                  <a:schemeClr val="bg1"/>
+                </a:solidFill>
+              </a:rPr>
+              <a:t>Les accidents légers représentent la grande majorité des données.</a:t>
+            </a:r>
+          </a:p>
+          <a:p>
+            <a:pPr marL="548640" lvl="2" indent="-167640">
+              <a:buFont typeface="Arial"/>
+              <a:buChar char="■"/>
+            </a:pPr>
+            <a:r>
+              <a:rPr lang="fr-FR" dirty="0">
+                <a:solidFill>
+                  <a:schemeClr val="bg1"/>
+                </a:solidFill>
+              </a:rPr>
+              <a:t>Si l'</a:t>
+            </a:r>
+            <a:r>
+              <a:rPr lang="fr-FR" dirty="0" err="1">
+                <a:solidFill>
+                  <a:schemeClr val="bg1"/>
+                </a:solidFill>
+              </a:rPr>
+              <a:t>Accuracy</a:t>
+            </a:r>
+            <a:r>
+              <a:rPr lang="fr-FR" dirty="0">
+                <a:solidFill>
+                  <a:schemeClr val="bg1"/>
+                </a:solidFill>
+              </a:rPr>
+              <a:t> chute:</a:t>
+            </a:r>
+          </a:p>
+          <a:p>
+            <a:pPr marL="731520" lvl="3" indent="-161290">
+              <a:buSzPts val="1100"/>
+              <a:buFont typeface="Arial"/>
+              <a:buChar char="●"/>
+            </a:pPr>
+            <a:r>
+              <a:rPr lang="fr-FR" sz="1100" dirty="0">
+                <a:solidFill>
+                  <a:schemeClr val="bg1"/>
+                </a:solidFill>
+              </a:rPr>
+              <a:t>Cela signifie que le modèle commence à se tromper de plus en plus sur les cas simples.</a:t>
+            </a:r>
+          </a:p>
+          <a:p>
+            <a:pPr marL="731520" lvl="3" indent="-161290">
+              <a:buSzPts val="1100"/>
+              <a:buFont typeface="Arial"/>
+              <a:buChar char="●"/>
+            </a:pPr>
+            <a:r>
+              <a:rPr lang="fr-FR" sz="1100" dirty="0">
+                <a:solidFill>
+                  <a:schemeClr val="bg1"/>
+                </a:solidFill>
+              </a:rPr>
+              <a:t>Signal de changement de comportement (ex: données d'entrée change probablement de nature)</a:t>
+            </a:r>
+            <a:endParaRPr lang="fr-FR" sz="1050" dirty="0">
+              <a:solidFill>
+                <a:schemeClr val="bg1"/>
+              </a:solidFill>
+              <a:latin typeface="Work Sans"/>
+            </a:endParaRPr>
+          </a:p>
+          <a:p>
+            <a:pPr marL="200000" indent="-200000">
+              <a:lnSpc>
+                <a:spcPct val="115000"/>
+              </a:lnSpc>
+              <a:spcAft>
+                <a:spcPts val="80"/>
+              </a:spcAft>
+              <a:buClr>
+                <a:schemeClr val="bg1"/>
+              </a:buClr>
+              <a:buSzPts val="1200"/>
+              <a:buFont typeface="Inter"/>
+              <a:buChar char="✓"/>
+            </a:pPr>
+            <a:endParaRPr lang="fr-FR" sz="1050" dirty="0">
+              <a:solidFill>
+                <a:srgbClr val="FFFFFF"/>
+              </a:solidFill>
+              <a:latin typeface="Work Sans"/>
+              <a:ea typeface="Inter"/>
+              <a:sym typeface="Inter"/>
+            </a:endParaRPr>
+          </a:p>
+          <a:p>
+            <a:pPr>
+              <a:lnSpc>
+                <a:spcPct val="115000"/>
+              </a:lnSpc>
+              <a:spcAft>
+                <a:spcPts val="80"/>
+              </a:spcAft>
+              <a:buClr>
+                <a:schemeClr val="bg1"/>
+              </a:buClr>
+              <a:buSzPts val="1200"/>
+            </a:pPr>
+            <a:endParaRPr lang="fr-FR" sz="1050" dirty="0">
+              <a:solidFill>
+                <a:srgbClr val="FFFFFF"/>
+              </a:solidFill>
+              <a:latin typeface="Work Sans"/>
+              <a:ea typeface="Inter"/>
+              <a:sym typeface="Inter"/>
+            </a:endParaRPr>
+          </a:p>
+        </p:txBody>
+      </p:sp>
+    </p:spTree>
+    <p:extLst>
+      <p:ext uri="{BB962C8B-B14F-4D97-AF65-F5344CB8AC3E}">
+        <p14:creationId xmlns:p14="http://schemas.microsoft.com/office/powerpoint/2010/main" val="637740850"/>
+      </p:ext>
+    </p:extLst>
+  </p:cSld>
+  <p:clrMapOvr>
+    <a:masterClrMapping/>
+  </p:clrMapOvr>
+</p:sld>
+</file>
+
+<file path=ppt/slides/slide5.xml><?xml version="1.0" encoding="utf-8"?>
+<p:sld xmlns:a="http://schemas.openxmlformats.org/drawingml/2006/main" xmlns:r="http://schemas.openxmlformats.org/officeDocument/2006/relationships" xmlns:p="http://schemas.openxmlformats.org/presentationml/2006/main">
+  <p:cSld>
+    <p:spTree>
+      <p:nvGrpSpPr>
         <p:cNvPr id="1" name="Shape 1"/>
         <p:cNvGrpSpPr/>
         <p:nvPr/>
@@ -57521,7 +58434,7 @@
 </p:sld>
 </file>
 
-<file path=ppt/slides/slide5.xml><?xml version="1.0" encoding="utf-8"?>
+<file path=ppt/slides/slide6.xml><?xml version="1.0" encoding="utf-8"?>
 <p:sld xmlns:a="http://schemas.openxmlformats.org/drawingml/2006/main" xmlns:r="http://schemas.openxmlformats.org/officeDocument/2006/relationships" xmlns:p="http://schemas.openxmlformats.org/presentationml/2006/main">
   <p:cSld>
     <p:spTree>
@@ -57870,7 +58783,7 @@
 </p:sld>
 </file>
 
-<file path=ppt/slides/slide6.xml><?xml version="1.0" encoding="utf-8"?>
+<file path=ppt/slides/slide7.xml><?xml version="1.0" encoding="utf-8"?>
 <p:sld xmlns:a="http://schemas.openxmlformats.org/drawingml/2006/main" xmlns:r="http://schemas.openxmlformats.org/officeDocument/2006/relationships" xmlns:p="http://schemas.openxmlformats.org/presentationml/2006/main">
   <p:cSld>
     <p:spTree>
@@ -57994,7 +58907,7 @@
 </p:sld>
 </file>
 
-<file path=ppt/slides/slide7.xml><?xml version="1.0" encoding="utf-8"?>
+<file path=ppt/slides/slide8.xml><?xml version="1.0" encoding="utf-8"?>
 <p:sld xmlns:a="http://schemas.openxmlformats.org/drawingml/2006/main" xmlns:r="http://schemas.openxmlformats.org/officeDocument/2006/relationships" xmlns:p="http://schemas.openxmlformats.org/presentationml/2006/main">
   <p:cSld>
     <p:bg>
@@ -58279,7 +59192,7 @@
 </p:sld>
 </file>
 
-<file path=ppt/slides/slide8.xml><?xml version="1.0" encoding="utf-8"?>
+<file path=ppt/slides/slide9.xml><?xml version="1.0" encoding="utf-8"?>
 <p:sld xmlns:a="http://schemas.openxmlformats.org/drawingml/2006/main" xmlns:r="http://schemas.openxmlformats.org/officeDocument/2006/relationships" xmlns:p="http://schemas.openxmlformats.org/presentationml/2006/main">
   <p:cSld>
     <p:spTree>
@@ -59418,174 +60331,6 @@
         <p14:creationId xmlns:p14="http://schemas.microsoft.com/office/powerpoint/2010/main" val="548654821"/>
       </p:ext>
     </p:extLst>
-  </p:cSld>
-  <p:clrMapOvr>
-    <a:masterClrMapping/>
-  </p:clrMapOvr>
-</p:sld>
-</file>
-
-<file path=ppt/slides/slide9.xml><?xml version="1.0" encoding="utf-8"?>
-<p:sld xmlns:a="http://schemas.openxmlformats.org/drawingml/2006/main" xmlns:r="http://schemas.openxmlformats.org/officeDocument/2006/relationships" xmlns:p="http://schemas.openxmlformats.org/presentationml/2006/main">
-  <p:cSld>
-    <p:bg>
-      <p:bgPr>
-        <a:solidFill>
-          <a:srgbClr val="E8E7E1"/>
-        </a:solidFill>
-        <a:effectLst/>
-      </p:bgPr>
-    </p:bg>
-    <p:spTree>
-      <p:nvGrpSpPr>
-        <p:cNvPr id="1" name="Shape 935"/>
-        <p:cNvGrpSpPr/>
-        <p:nvPr/>
-      </p:nvGrpSpPr>
-      <p:grpSpPr>
-        <a:xfrm>
-          <a:off x="0" y="0"/>
-          <a:ext cx="0" cy="0"/>
-          <a:chOff x="0" y="0"/>
-          <a:chExt cx="0" cy="0"/>
-        </a:xfrm>
-      </p:grpSpPr>
-      <p:pic>
-        <p:nvPicPr>
-          <p:cNvPr id="936" name="Google Shape;936;p112"/>
-          <p:cNvPicPr preferRelativeResize="0"/>
-          <p:nvPr/>
-        </p:nvPicPr>
-        <p:blipFill rotWithShape="1">
-          <a:blip r:embed="rId3">
-            <a:alphaModFix/>
-          </a:blip>
-          <a:srcRect t="209" b="209"/>
-          <a:stretch/>
-        </p:blipFill>
-        <p:spPr>
-          <a:xfrm>
-            <a:off x="198000" y="4747499"/>
-            <a:ext cx="547501" cy="172176"/>
-          </a:xfrm>
-          <a:prstGeom prst="rect">
-            <a:avLst/>
-          </a:prstGeom>
-          <a:noFill/>
-          <a:ln>
-            <a:noFill/>
-          </a:ln>
-        </p:spPr>
-      </p:pic>
-      <p:pic>
-        <p:nvPicPr>
-          <p:cNvPr id="937" name="Google Shape;937;p112"/>
-          <p:cNvPicPr preferRelativeResize="0"/>
-          <p:nvPr/>
-        </p:nvPicPr>
-        <p:blipFill rotWithShape="1">
-          <a:blip r:embed="rId4">
-            <a:alphaModFix/>
-          </a:blip>
-          <a:srcRect t="18838" r="42337"/>
-          <a:stretch/>
-        </p:blipFill>
-        <p:spPr>
-          <a:xfrm rot="5400000" flipH="1">
-            <a:off x="5031851" y="670425"/>
-            <a:ext cx="4943124" cy="3425224"/>
-          </a:xfrm>
-          <a:prstGeom prst="rect">
-            <a:avLst/>
-          </a:prstGeom>
-          <a:noFill/>
-          <a:ln>
-            <a:noFill/>
-          </a:ln>
-        </p:spPr>
-      </p:pic>
-      <p:pic>
-        <p:nvPicPr>
-          <p:cNvPr id="938" name="Google Shape;938;p112" title="undraw_faq_h01d.gif"/>
-          <p:cNvPicPr preferRelativeResize="0"/>
-          <p:nvPr/>
-        </p:nvPicPr>
-        <p:blipFill>
-          <a:blip r:embed="rId5">
-            <a:alphaModFix/>
-          </a:blip>
-          <a:stretch>
-            <a:fillRect/>
-          </a:stretch>
-        </p:blipFill>
-        <p:spPr>
-          <a:xfrm>
-            <a:off x="2859744" y="755832"/>
-            <a:ext cx="3256831" cy="2092348"/>
-          </a:xfrm>
-          <a:prstGeom prst="rect">
-            <a:avLst/>
-          </a:prstGeom>
-          <a:noFill/>
-          <a:ln>
-            <a:noFill/>
-          </a:ln>
-        </p:spPr>
-      </p:pic>
-      <p:sp>
-        <p:nvSpPr>
-          <p:cNvPr id="939" name="Google Shape;939;p112"/>
-          <p:cNvSpPr/>
-          <p:nvPr/>
-        </p:nvSpPr>
-        <p:spPr>
-          <a:xfrm>
-            <a:off x="2140299" y="2883396"/>
-            <a:ext cx="5481375" cy="1080679"/>
-          </a:xfrm>
-          <a:prstGeom prst="roundRect">
-            <a:avLst>
-              <a:gd name="adj" fmla="val 5390"/>
-            </a:avLst>
-          </a:prstGeom>
-          <a:solidFill>
-            <a:srgbClr val="1A1A33"/>
-          </a:solidFill>
-          <a:ln>
-            <a:noFill/>
-          </a:ln>
-        </p:spPr>
-        <p:txBody>
-          <a:bodyPr spcFirstLastPara="1" wrap="square" lIns="142950" tIns="142950" rIns="142950" bIns="142950" anchor="ctr" anchorCtr="0">
-            <a:noAutofit/>
-          </a:bodyPr>
-          <a:lstStyle/>
-          <a:p>
-            <a:pPr marL="0" lvl="0" indent="0" algn="ctr" rtl="0">
-              <a:spcBef>
-                <a:spcPts val="0"/>
-              </a:spcBef>
-              <a:spcAft>
-                <a:spcPts val="0"/>
-              </a:spcAft>
-              <a:buNone/>
-            </a:pPr>
-            <a:r>
-              <a:rPr lang="fr" sz="2814" b="1" dirty="0">
-                <a:solidFill>
-                  <a:srgbClr val="F5FAFF"/>
-                </a:solidFill>
-                <a:latin typeface="Inter"/>
-                <a:ea typeface="Inter"/>
-                <a:cs typeface="Inter"/>
-                <a:sym typeface="Inter"/>
-              </a:rPr>
-              <a:t>Merci de votre attention</a:t>
-            </a:r>
-          </a:p>
-        </p:txBody>
-      </p:sp>
-    </p:spTree>
   </p:cSld>
   <p:clrMapOvr>
     <a:masterClrMapping/>
